--- a/assets/powerpoints/module-n3-epicerie/D1-a-la-caisse.pptx
+++ b/assets/powerpoints/module-n3-epicerie/D1-a-la-caisse.pptx
@@ -13014,7 +13014,25 @@
                 </a:solidFill>
                 <a:latin typeface="Verdana"/>
               </a:rPr>
-              <a:t>À l'oral, on dit souvent le montant sans le mot « dollars » ni le mot « cents » : « quarante-deux quinze ». Le premier nombre est en dollars, le second en cents. Si vous n'avez pas compris : « &lt;b&gt;Pardon, vous pouvez répéter le montant ?&lt;/b&gt; »</a:t>
+              <a:t>À l'oral, on dit souvent le montant sans le mot « dollars » ni le mot « cents » : « quarante-deux quinze ». Le premier nombre est en dollars, le second en cents. Si vous n'avez pas compris : « </a:t>
+            </a:r>
+            <a:r>
+              <a:rPr sz="2000" b="1" i="0">
+                <a:solidFill>
+                  <a:srgbClr val="4B4F52"/>
+                </a:solidFill>
+                <a:latin typeface="Verdana"/>
+              </a:rPr>
+              <a:t>Pardon, vous pouvez répéter le montant ?</a:t>
+            </a:r>
+            <a:r>
+              <a:rPr sz="2000" b="0" i="0">
+                <a:solidFill>
+                  <a:srgbClr val="4B4F52"/>
+                </a:solidFill>
+                <a:latin typeface="Verdana"/>
+              </a:rPr>
+              <a:t> »</a:t>
             </a:r>
           </a:p>
         </p:txBody>
